--- a/plan/eCMRs_Implementation_Plan.pptx
+++ b/plan/eCMRs_Implementation_Plan.pptx
@@ -4415,7 +4415,7 @@
                 <a:ea typeface="Calibri" pitchFamily="34" charset="-122"/>
                 <a:cs typeface="Calibri" pitchFamily="34" charset="-120"/>
               </a:rPr>
-              <a:t>Decide: Notify, Reported By lookup, Assigned Buyer, Sub Assembly</a:t>
+              <a:t>Decide: Reported By lookup, Assigned Buyer, Sub Assembly</a:t>
             </a:r>
             <a:endParaRPr lang="en-US" sz="1500" dirty="0"/>
           </a:p>
